--- a/doc/Präsentation_SGLOOR.pptx
+++ b/doc/Präsentation_SGLOOR.pptx
@@ -1206,7 +1206,8 @@
               <a:buNone/>
             </a:pPr>
             <a:r>
-              <a:t/>
+              <a:rPr lang="de-CH" sz="2000"/>
+              <a:t>Test-Pyramide von Mike Cohn</a:t>
             </a:r>
             <a:endParaRPr b="0" sz="2000" strike="noStrike">
               <a:latin typeface="Arial"/>
@@ -1367,6 +1368,34 @@
           <a:lstStyle/>
           <a:p>
             <a:pPr indent="0" lvl="0" marL="216000" rtl="0" algn="l">
+              <a:spcBef>
+                <a:spcPts val="0"/>
+              </a:spcBef>
+              <a:spcAft>
+                <a:spcPts val="0"/>
+              </a:spcAft>
+              <a:buClr>
+                <a:schemeClr val="dk1"/>
+              </a:buClr>
+              <a:buFont typeface="Arial"/>
+              <a:buNone/>
+            </a:pPr>
+            <a:r>
+              <a:rPr lang="de-CH" sz="2000">
+                <a:solidFill>
+                  <a:schemeClr val="dk1"/>
+                </a:solidFill>
+              </a:rPr>
+              <a:t>Test-Pyramide von Mike Cohn</a:t>
+            </a:r>
+            <a:endParaRPr sz="2000">
+              <a:solidFill>
+                <a:schemeClr val="dk1"/>
+              </a:solidFill>
+            </a:endParaRPr>
+          </a:p>
+          <a:p>
+            <a:pPr indent="0" lvl="0" marL="216000" rtl="0" algn="l">
               <a:lnSpc>
                 <a:spcPct val="100000"/>
               </a:lnSpc>
@@ -1381,12 +1410,7 @@
             <a:r>
               <a:t/>
             </a:r>
-            <a:endParaRPr b="0" sz="2000" strike="noStrike">
-              <a:latin typeface="Arial"/>
-              <a:ea typeface="Arial"/>
-              <a:cs typeface="Arial"/>
-              <a:sym typeface="Arial"/>
-            </a:endParaRPr>
+            <a:endParaRPr sz="2000"/>
           </a:p>
         </p:txBody>
       </p:sp>
@@ -1540,6 +1564,34 @@
           <a:lstStyle/>
           <a:p>
             <a:pPr indent="0" lvl="0" marL="216000" rtl="0" algn="l">
+              <a:spcBef>
+                <a:spcPts val="0"/>
+              </a:spcBef>
+              <a:spcAft>
+                <a:spcPts val="0"/>
+              </a:spcAft>
+              <a:buClr>
+                <a:schemeClr val="dk1"/>
+              </a:buClr>
+              <a:buFont typeface="Arial"/>
+              <a:buNone/>
+            </a:pPr>
+            <a:r>
+              <a:rPr lang="de-CH" sz="2000">
+                <a:solidFill>
+                  <a:schemeClr val="dk1"/>
+                </a:solidFill>
+              </a:rPr>
+              <a:t>Test-Pyramide von Mike Cohn</a:t>
+            </a:r>
+            <a:endParaRPr sz="2000">
+              <a:solidFill>
+                <a:schemeClr val="dk1"/>
+              </a:solidFill>
+            </a:endParaRPr>
+          </a:p>
+          <a:p>
+            <a:pPr indent="0" lvl="0" marL="216000" rtl="0" algn="l">
               <a:lnSpc>
                 <a:spcPct val="100000"/>
               </a:lnSpc>
@@ -1554,12 +1606,7 @@
             <a:r>
               <a:t/>
             </a:r>
-            <a:endParaRPr b="0" sz="2000" strike="noStrike">
-              <a:latin typeface="Arial"/>
-              <a:ea typeface="Arial"/>
-              <a:cs typeface="Arial"/>
-              <a:sym typeface="Arial"/>
-            </a:endParaRPr>
+            <a:endParaRPr sz="2000"/>
           </a:p>
         </p:txBody>
       </p:sp>
@@ -1713,6 +1760,34 @@
           <a:lstStyle/>
           <a:p>
             <a:pPr indent="0" lvl="0" marL="216000" rtl="0" algn="l">
+              <a:spcBef>
+                <a:spcPts val="0"/>
+              </a:spcBef>
+              <a:spcAft>
+                <a:spcPts val="0"/>
+              </a:spcAft>
+              <a:buClr>
+                <a:schemeClr val="dk1"/>
+              </a:buClr>
+              <a:buFont typeface="Arial"/>
+              <a:buNone/>
+            </a:pPr>
+            <a:r>
+              <a:rPr lang="de-CH" sz="2000">
+                <a:solidFill>
+                  <a:schemeClr val="dk1"/>
+                </a:solidFill>
+              </a:rPr>
+              <a:t>Test-Pyramide von Mike Cohn</a:t>
+            </a:r>
+            <a:endParaRPr sz="2000">
+              <a:solidFill>
+                <a:schemeClr val="dk1"/>
+              </a:solidFill>
+            </a:endParaRPr>
+          </a:p>
+          <a:p>
+            <a:pPr indent="0" lvl="0" marL="216000" rtl="0" algn="l">
               <a:lnSpc>
                 <a:spcPct val="100000"/>
               </a:lnSpc>
@@ -1727,12 +1802,7 @@
             <a:r>
               <a:t/>
             </a:r>
-            <a:endParaRPr b="0" sz="2000" strike="noStrike">
-              <a:latin typeface="Arial"/>
-              <a:ea typeface="Arial"/>
-              <a:cs typeface="Arial"/>
-              <a:sym typeface="Arial"/>
-            </a:endParaRPr>
+            <a:endParaRPr sz="2000"/>
           </a:p>
         </p:txBody>
       </p:sp>
@@ -1886,6 +1956,34 @@
           <a:lstStyle/>
           <a:p>
             <a:pPr indent="0" lvl="0" marL="216000" rtl="0" algn="l">
+              <a:spcBef>
+                <a:spcPts val="0"/>
+              </a:spcBef>
+              <a:spcAft>
+                <a:spcPts val="0"/>
+              </a:spcAft>
+              <a:buClr>
+                <a:schemeClr val="dk1"/>
+              </a:buClr>
+              <a:buFont typeface="Arial"/>
+              <a:buNone/>
+            </a:pPr>
+            <a:r>
+              <a:rPr lang="de-CH" sz="2000">
+                <a:solidFill>
+                  <a:schemeClr val="dk1"/>
+                </a:solidFill>
+              </a:rPr>
+              <a:t>Test-Pyramide von Mike Cohn</a:t>
+            </a:r>
+            <a:endParaRPr sz="2000">
+              <a:solidFill>
+                <a:schemeClr val="dk1"/>
+              </a:solidFill>
+            </a:endParaRPr>
+          </a:p>
+          <a:p>
+            <a:pPr indent="0" lvl="0" marL="216000" rtl="0" algn="l">
               <a:lnSpc>
                 <a:spcPct val="100000"/>
               </a:lnSpc>
@@ -1900,12 +1998,7 @@
             <a:r>
               <a:t/>
             </a:r>
-            <a:endParaRPr b="0" sz="2000" strike="noStrike">
-              <a:latin typeface="Arial"/>
-              <a:ea typeface="Arial"/>
-              <a:cs typeface="Arial"/>
-              <a:sym typeface="Arial"/>
-            </a:endParaRPr>
+            <a:endParaRPr sz="2000"/>
           </a:p>
         </p:txBody>
       </p:sp>
@@ -2059,6 +2152,34 @@
           <a:lstStyle/>
           <a:p>
             <a:pPr indent="0" lvl="0" marL="216000" rtl="0" algn="l">
+              <a:spcBef>
+                <a:spcPts val="0"/>
+              </a:spcBef>
+              <a:spcAft>
+                <a:spcPts val="0"/>
+              </a:spcAft>
+              <a:buClr>
+                <a:schemeClr val="dk1"/>
+              </a:buClr>
+              <a:buFont typeface="Arial"/>
+              <a:buNone/>
+            </a:pPr>
+            <a:r>
+              <a:rPr lang="de-CH" sz="2000">
+                <a:solidFill>
+                  <a:schemeClr val="dk1"/>
+                </a:solidFill>
+              </a:rPr>
+              <a:t>Test-Pyramide von Mike Cohn</a:t>
+            </a:r>
+            <a:endParaRPr sz="2000">
+              <a:solidFill>
+                <a:schemeClr val="dk1"/>
+              </a:solidFill>
+            </a:endParaRPr>
+          </a:p>
+          <a:p>
+            <a:pPr indent="0" lvl="0" marL="216000" rtl="0" algn="l">
               <a:lnSpc>
                 <a:spcPct val="100000"/>
               </a:lnSpc>
@@ -2073,12 +2194,7 @@
             <a:r>
               <a:t/>
             </a:r>
-            <a:endParaRPr b="0" sz="2000" strike="noStrike">
-              <a:latin typeface="Arial"/>
-              <a:ea typeface="Arial"/>
-              <a:cs typeface="Arial"/>
-              <a:sym typeface="Arial"/>
-            </a:endParaRPr>
+            <a:endParaRPr sz="2000"/>
           </a:p>
         </p:txBody>
       </p:sp>
@@ -8898,7 +9014,7 @@
         <p:spPr>
           <a:xfrm>
             <a:off x="5040000" y="1584000"/>
-            <a:ext cx="6768000" cy="4824000"/>
+            <a:ext cx="6768000" cy="5808900"/>
           </a:xfrm>
           <a:prstGeom prst="rect">
             <a:avLst/>

--- a/doc/Präsentation_SGLOOR.pptx
+++ b/doc/Präsentation_SGLOOR.pptx
@@ -9013,8 +9013,8 @@
         </p:nvSpPr>
         <p:spPr>
           <a:xfrm>
-            <a:off x="5040000" y="1584000"/>
-            <a:ext cx="6768000" cy="5808900"/>
+            <a:off x="5030375" y="1834150"/>
+            <a:ext cx="6768000" cy="4744200"/>
           </a:xfrm>
           <a:prstGeom prst="rect">
             <a:avLst/>
@@ -9030,7 +9030,7 @@
           </a:bodyPr>
           <a:lstStyle/>
           <a:p>
-            <a:pPr indent="-228240" lvl="0" marL="228600" marR="0" rtl="0" algn="l">
+            <a:pPr indent="-228241" lvl="0" marL="228600" marR="0" rtl="0" algn="l">
               <a:lnSpc>
                 <a:spcPct val="90000"/>
               </a:lnSpc>
@@ -9059,17 +9059,15 @@
               </a:rPr>
               <a:t>e2e-Tests</a:t>
             </a:r>
-            <a:endParaRPr b="0" i="0" sz="2800" u="none" cap="none" strike="noStrike">
-              <a:latin typeface="Arial"/>
-              <a:ea typeface="Arial"/>
-              <a:cs typeface="Arial"/>
-              <a:sym typeface="Arial"/>
-            </a:endParaRPr>
+            <a:endParaRPr sz="2800"/>
           </a:p>
           <a:p>
-            <a:pPr indent="-228600" lvl="0" marL="457200" marR="0" rtl="0" algn="l">
-              <a:spcBef>
-                <a:spcPts val="1417"/>
+            <a:pPr indent="-308610" lvl="1" marL="914400" marR="0" rtl="0" algn="l">
+              <a:lnSpc>
+                <a:spcPct val="90000"/>
+              </a:lnSpc>
+              <a:spcBef>
+                <a:spcPts val="0"/>
               </a:spcBef>
               <a:spcAft>
                 <a:spcPts val="0"/>
@@ -9078,8 +9076,8 @@
                 <a:srgbClr val="000000"/>
               </a:buClr>
               <a:buSzPts val="1260"/>
-              <a:buFont typeface="Noto Sans Symbols"/>
-              <a:buChar char="●"/>
+              <a:buFont typeface="Arial"/>
+              <a:buChar char="○"/>
             </a:pPr>
             <a:r>
               <a:rPr b="0" i="0" lang="de-CH" sz="2800" u="none" cap="none" strike="noStrike">
@@ -9093,17 +9091,15 @@
               </a:rPr>
               <a:t>keine vollständige Abdeckung ( &lt; 80 %)</a:t>
             </a:r>
-            <a:endParaRPr b="0" i="0" sz="2800" u="none" cap="none" strike="noStrike">
-              <a:latin typeface="Arial"/>
-              <a:ea typeface="Arial"/>
-              <a:cs typeface="Arial"/>
-              <a:sym typeface="Arial"/>
-            </a:endParaRPr>
+            <a:endParaRPr sz="2800"/>
           </a:p>
           <a:p>
-            <a:pPr indent="-228600" lvl="0" marL="457200" marR="0" rtl="0" algn="l">
-              <a:spcBef>
-                <a:spcPts val="1417"/>
+            <a:pPr indent="-308610" lvl="1" marL="914400" marR="0" rtl="0" algn="l">
+              <a:lnSpc>
+                <a:spcPct val="90000"/>
+              </a:lnSpc>
+              <a:spcBef>
+                <a:spcPts val="0"/>
               </a:spcBef>
               <a:spcAft>
                 <a:spcPts val="0"/>
@@ -9112,9 +9108,30 @@
                 <a:srgbClr val="000000"/>
               </a:buClr>
               <a:buSzPts val="1260"/>
-              <a:buFont typeface="Noto Sans Symbols"/>
-              <a:buChar char="●"/>
+              <a:buFont typeface="Arial"/>
+              <a:buChar char="○"/>
             </a:pPr>
+            <a:r>
+              <a:rPr lang="de-CH" sz="2800">
+                <a:solidFill>
+                  <a:schemeClr val="dk1"/>
+                </a:solidFill>
+                <a:latin typeface="Calibri"/>
+                <a:ea typeface="Calibri"/>
+                <a:cs typeface="Calibri"/>
+                <a:sym typeface="Calibri"/>
+              </a:rPr>
+              <a:t>sprachunabhängig </a:t>
+            </a:r>
+            <a:r>
+              <a:rPr lang="de-CH" sz="2800">
+                <a:latin typeface="Calibri"/>
+                <a:ea typeface="Calibri"/>
+                <a:cs typeface="Calibri"/>
+                <a:sym typeface="Calibri"/>
+              </a:rPr>
+              <a:t>testen </a:t>
+            </a:r>
             <a:r>
               <a:rPr b="0" i="0" lang="de-CH" sz="2800" u="none" cap="none" strike="noStrike">
                 <a:solidFill>
@@ -9125,19 +9142,22 @@
                 <a:cs typeface="Calibri"/>
                 <a:sym typeface="Calibri"/>
               </a:rPr>
-              <a:t>Prüfen ob Navigation funktioniert </a:t>
+              <a:t>ob Navigation </a:t>
             </a:r>
-            <a:endParaRPr b="0" i="0" sz="2800" u="none" cap="none" strike="noStrike">
-              <a:latin typeface="Arial"/>
-              <a:ea typeface="Arial"/>
-              <a:cs typeface="Arial"/>
-              <a:sym typeface="Arial"/>
+            <a:endParaRPr sz="2800">
+              <a:latin typeface="Calibri"/>
+              <a:ea typeface="Calibri"/>
+              <a:cs typeface="Calibri"/>
+              <a:sym typeface="Calibri"/>
             </a:endParaRPr>
           </a:p>
           <a:p>
-            <a:pPr indent="-228600" lvl="0" marL="457200" marR="0" rtl="0" algn="l">
-              <a:spcBef>
-                <a:spcPts val="1417"/>
+            <a:pPr indent="-308610" lvl="1" marL="914400" marR="0" rtl="0" algn="l">
+              <a:lnSpc>
+                <a:spcPct val="90000"/>
+              </a:lnSpc>
+              <a:spcBef>
+                <a:spcPts val="0"/>
               </a:spcBef>
               <a:spcAft>
                 <a:spcPts val="0"/>
@@ -9146,8 +9166,45 @@
                 <a:srgbClr val="000000"/>
               </a:buClr>
               <a:buSzPts val="1260"/>
-              <a:buFont typeface="Noto Sans Symbols"/>
-              <a:buChar char="●"/>
+              <a:buFont typeface="Arial"/>
+              <a:buChar char="○"/>
+            </a:pPr>
+            <a:r>
+              <a:rPr lang="de-CH" sz="2800">
+                <a:solidFill>
+                  <a:schemeClr val="dk1"/>
+                </a:solidFill>
+                <a:latin typeface="Calibri"/>
+                <a:ea typeface="Calibri"/>
+                <a:cs typeface="Calibri"/>
+                <a:sym typeface="Calibri"/>
+              </a:rPr>
+              <a:t>multi-language tested</a:t>
+            </a:r>
+            <a:endParaRPr sz="2800">
+              <a:latin typeface="Calibri"/>
+              <a:ea typeface="Calibri"/>
+              <a:cs typeface="Calibri"/>
+              <a:sym typeface="Calibri"/>
+            </a:endParaRPr>
+          </a:p>
+          <a:p>
+            <a:pPr indent="-308610" lvl="1" marL="914400" marR="0" rtl="0" algn="l">
+              <a:lnSpc>
+                <a:spcPct val="90000"/>
+              </a:lnSpc>
+              <a:spcBef>
+                <a:spcPts val="0"/>
+              </a:spcBef>
+              <a:spcAft>
+                <a:spcPts val="0"/>
+              </a:spcAft>
+              <a:buClr>
+                <a:srgbClr val="000000"/>
+              </a:buClr>
+              <a:buSzPts val="1260"/>
+              <a:buFont typeface="Arial"/>
+              <a:buChar char="○"/>
             </a:pPr>
             <a:r>
               <a:rPr b="0" i="0" lang="de-CH" sz="2800" u="none" cap="none" strike="noStrike">
@@ -9186,10 +9243,74 @@
               <a:t>) testen</a:t>
             </a:r>
             <a:endParaRPr b="0" i="0" sz="2800" u="none" cap="none" strike="noStrike">
-              <a:latin typeface="Arial"/>
-              <a:ea typeface="Arial"/>
-              <a:cs typeface="Arial"/>
-              <a:sym typeface="Arial"/>
+              <a:solidFill>
+                <a:srgbClr val="000000"/>
+              </a:solidFill>
+              <a:latin typeface="Calibri"/>
+              <a:ea typeface="Calibri"/>
+              <a:cs typeface="Calibri"/>
+              <a:sym typeface="Calibri"/>
+            </a:endParaRPr>
+          </a:p>
+          <a:p>
+            <a:pPr indent="-308610" lvl="1" marL="914400" rtl="0" algn="l">
+              <a:spcBef>
+                <a:spcPts val="1417"/>
+              </a:spcBef>
+              <a:spcAft>
+                <a:spcPts val="0"/>
+              </a:spcAft>
+              <a:buClr>
+                <a:schemeClr val="dk1"/>
+              </a:buClr>
+              <a:buSzPts val="1260"/>
+              <a:buFont typeface="Noto Sans Symbols"/>
+              <a:buChar char="○"/>
+            </a:pPr>
+            <a:r>
+              <a:rPr lang="de-CH" sz="2800">
+                <a:solidFill>
+                  <a:schemeClr val="dk1"/>
+                </a:solidFill>
+                <a:latin typeface="Calibri"/>
+                <a:ea typeface="Calibri"/>
+                <a:cs typeface="Calibri"/>
+                <a:sym typeface="Calibri"/>
+              </a:rPr>
+              <a:t>Relevante Auflösungen</a:t>
+            </a:r>
+            <a:r>
+              <a:rPr lang="de-CH" sz="2800">
+                <a:solidFill>
+                  <a:schemeClr val="dk1"/>
+                </a:solidFill>
+              </a:rPr>
+              <a:t> </a:t>
+            </a:r>
+            <a:r>
+              <a:rPr lang="de-CH" sz="2800">
+                <a:solidFill>
+                  <a:schemeClr val="dk1"/>
+                </a:solidFill>
+                <a:latin typeface="Calibri"/>
+                <a:ea typeface="Calibri"/>
+                <a:cs typeface="Calibri"/>
+                <a:sym typeface="Calibri"/>
+              </a:rPr>
+              <a:t>Mobile, Laptop</a:t>
+            </a:r>
+            <a:r>
+              <a:rPr lang="de-CH" sz="2800">
+                <a:solidFill>
+                  <a:schemeClr val="dk1"/>
+                </a:solidFill>
+              </a:rPr>
+              <a:t>…</a:t>
+            </a:r>
+            <a:endParaRPr sz="2800">
+              <a:solidFill>
+                <a:schemeClr val="dk1"/>
+              </a:solidFill>
             </a:endParaRPr>
           </a:p>
           <a:p>
@@ -9217,177 +9338,7 @@
                 <a:cs typeface="Calibri"/>
                 <a:sym typeface="Calibri"/>
               </a:rPr>
-              <a:t>Content – Typen modular (fpui-widget)</a:t>
-            </a:r>
-            <a:endParaRPr b="0" i="0" sz="2800" u="none" cap="none" strike="noStrike">
-              <a:latin typeface="Arial"/>
-              <a:ea typeface="Arial"/>
-              <a:cs typeface="Arial"/>
-              <a:sym typeface="Arial"/>
-            </a:endParaRPr>
-          </a:p>
-          <a:p>
-            <a:pPr indent="-228600" lvl="0" marL="457200" marR="0" rtl="0" algn="l">
-              <a:spcBef>
-                <a:spcPts val="1417"/>
-              </a:spcBef>
-              <a:spcAft>
-                <a:spcPts val="0"/>
-              </a:spcAft>
-              <a:buClr>
-                <a:srgbClr val="000000"/>
-              </a:buClr>
-              <a:buSzPts val="1260"/>
-              <a:buFont typeface="Noto Sans Symbols"/>
-              <a:buChar char="●"/>
-            </a:pPr>
-            <a:r>
-              <a:rPr b="0" i="0" lang="de-CH" sz="2800" u="none" cap="none" strike="noStrike">
-                <a:solidFill>
-                  <a:srgbClr val="000000"/>
-                </a:solidFill>
-                <a:latin typeface="Calibri"/>
-                <a:ea typeface="Calibri"/>
-                <a:cs typeface="Calibri"/>
-                <a:sym typeface="Calibri"/>
-              </a:rPr>
-              <a:t>Relevante Auflösungen</a:t>
-            </a:r>
-            <a:endParaRPr b="0" i="0" sz="2800" u="none" cap="none" strike="noStrike">
-              <a:latin typeface="Arial"/>
-              <a:ea typeface="Arial"/>
-              <a:cs typeface="Arial"/>
-              <a:sym typeface="Arial"/>
-            </a:endParaRPr>
-          </a:p>
-          <a:p>
-            <a:pPr indent="-228600" lvl="1" marL="457200" marR="0" rtl="0" algn="l">
-              <a:spcBef>
-                <a:spcPts val="1417"/>
-              </a:spcBef>
-              <a:spcAft>
-                <a:spcPts val="0"/>
-              </a:spcAft>
-              <a:buClr>
-                <a:srgbClr val="000000"/>
-              </a:buClr>
-              <a:buSzPts val="2100"/>
-              <a:buFont typeface="Noto Sans Symbols"/>
-              <a:buChar char="−"/>
-            </a:pPr>
-            <a:r>
-              <a:rPr b="0" i="0" lang="de-CH" sz="2800" u="none" cap="none" strike="noStrike">
-                <a:solidFill>
-                  <a:srgbClr val="000000"/>
-                </a:solidFill>
-                <a:latin typeface="Calibri"/>
-                <a:ea typeface="Calibri"/>
-                <a:cs typeface="Calibri"/>
-                <a:sym typeface="Calibri"/>
-              </a:rPr>
-              <a:t>Mobile </a:t>
-            </a:r>
-            <a:endParaRPr b="0" i="0" sz="2800" u="none" cap="none" strike="noStrike">
-              <a:latin typeface="Arial"/>
-              <a:ea typeface="Arial"/>
-              <a:cs typeface="Arial"/>
-              <a:sym typeface="Arial"/>
-            </a:endParaRPr>
-          </a:p>
-          <a:p>
-            <a:pPr indent="-228600" lvl="1" marL="457200" marR="0" rtl="0" algn="l">
-              <a:spcBef>
-                <a:spcPts val="1134"/>
-              </a:spcBef>
-              <a:spcAft>
-                <a:spcPts val="0"/>
-              </a:spcAft>
-              <a:buClr>
-                <a:srgbClr val="000000"/>
-              </a:buClr>
-              <a:buSzPts val="2100"/>
-              <a:buFont typeface="Noto Sans Symbols"/>
-              <a:buChar char="−"/>
-            </a:pPr>
-            <a:r>
-              <a:rPr b="0" i="0" lang="de-CH" sz="2800" u="none" cap="none" strike="noStrike">
-                <a:solidFill>
-                  <a:srgbClr val="000000"/>
-                </a:solidFill>
-                <a:latin typeface="Calibri"/>
-                <a:ea typeface="Calibri"/>
-                <a:cs typeface="Calibri"/>
-                <a:sym typeface="Calibri"/>
-              </a:rPr>
-              <a:t>Tablet </a:t>
-            </a:r>
-            <a:endParaRPr b="0" i="0" sz="2800" u="none" cap="none" strike="noStrike">
-              <a:latin typeface="Arial"/>
-              <a:ea typeface="Arial"/>
-              <a:cs typeface="Arial"/>
-              <a:sym typeface="Arial"/>
-            </a:endParaRPr>
-          </a:p>
-          <a:p>
-            <a:pPr indent="-228600" lvl="1" marL="457200" marR="0" rtl="0" algn="l">
-              <a:spcBef>
-                <a:spcPts val="1134"/>
-              </a:spcBef>
-              <a:spcAft>
-                <a:spcPts val="0"/>
-              </a:spcAft>
-              <a:buClr>
-                <a:srgbClr val="000000"/>
-              </a:buClr>
-              <a:buSzPts val="2100"/>
-              <a:buFont typeface="Noto Sans Symbols"/>
-              <a:buChar char="−"/>
-            </a:pPr>
-            <a:r>
-              <a:rPr b="0" i="0" lang="de-CH" sz="2800" u="none" cap="none" strike="noStrike">
-                <a:solidFill>
-                  <a:srgbClr val="000000"/>
-                </a:solidFill>
-                <a:latin typeface="Calibri"/>
-                <a:ea typeface="Calibri"/>
-                <a:cs typeface="Calibri"/>
-                <a:sym typeface="Calibri"/>
-              </a:rPr>
-              <a:t>Notebook </a:t>
-            </a:r>
-            <a:endParaRPr b="0" i="0" sz="2800" u="none" cap="none" strike="noStrike">
-              <a:latin typeface="Arial"/>
-              <a:ea typeface="Arial"/>
-              <a:cs typeface="Arial"/>
-              <a:sym typeface="Arial"/>
-            </a:endParaRPr>
-          </a:p>
-          <a:p>
-            <a:pPr indent="-228600" lvl="1" marL="457200" marR="0" rtl="0" algn="l">
-              <a:spcBef>
-                <a:spcPts val="1134"/>
-              </a:spcBef>
-              <a:spcAft>
-                <a:spcPts val="0"/>
-              </a:spcAft>
-              <a:buClr>
-                <a:srgbClr val="000000"/>
-              </a:buClr>
-              <a:buSzPts val="2100"/>
-              <a:buFont typeface="Noto Sans Symbols"/>
-              <a:buChar char="−"/>
-            </a:pPr>
-            <a:r>
-              <a:rPr b="0" i="0" lang="de-CH" sz="2800" u="none" cap="none" strike="noStrike">
-                <a:solidFill>
-                  <a:srgbClr val="000000"/>
-                </a:solidFill>
-                <a:latin typeface="Calibri"/>
-                <a:ea typeface="Calibri"/>
-                <a:cs typeface="Calibri"/>
-                <a:sym typeface="Calibri"/>
-              </a:rPr>
-              <a:t>PC</a:t>
+              <a:t>Content – Typen modular (fpui-widget) als Page Object</a:t>
             </a:r>
             <a:endParaRPr b="0" i="0" sz="2800" u="none" cap="none" strike="noStrike">
               <a:latin typeface="Arial"/>

--- a/doc/Präsentation_SGLOOR.pptx
+++ b/doc/Präsentation_SGLOOR.pptx
@@ -9121,7 +9121,7 @@
                 <a:cs typeface="Calibri"/>
                 <a:sym typeface="Calibri"/>
               </a:rPr>
-              <a:t>sprachunabhängig </a:t>
+              <a:t>Navigation und Elemente (im  DOM) sprachunabhängig </a:t>
             </a:r>
             <a:r>
               <a:rPr lang="de-CH" sz="2800">
@@ -9131,18 +9131,6 @@
                 <a:sym typeface="Calibri"/>
               </a:rPr>
               <a:t>testen </a:t>
-            </a:r>
-            <a:r>
-              <a:rPr b="0" i="0" lang="de-CH" sz="2800" u="none" cap="none" strike="noStrike">
-                <a:solidFill>
-                  <a:srgbClr val="000000"/>
-                </a:solidFill>
-                <a:latin typeface="Calibri"/>
-                <a:ea typeface="Calibri"/>
-                <a:cs typeface="Calibri"/>
-                <a:sym typeface="Calibri"/>
-              </a:rPr>
-              <a:t>ob Navigation </a:t>
             </a:r>
             <a:endParaRPr sz="2800">
               <a:latin typeface="Calibri"/>
@@ -9242,10 +9230,7 @@
               </a:rPr>
               <a:t>) testen</a:t>
             </a:r>
-            <a:endParaRPr b="0" i="0" sz="2800" u="none" cap="none" strike="noStrike">
-              <a:solidFill>
-                <a:srgbClr val="000000"/>
-              </a:solidFill>
+            <a:endParaRPr sz="2800">
               <a:latin typeface="Calibri"/>
               <a:ea typeface="Calibri"/>
               <a:cs typeface="Calibri"/>
@@ -9253,18 +9238,21 @@
             </a:endParaRPr>
           </a:p>
           <a:p>
-            <a:pPr indent="-308610" lvl="1" marL="914400" rtl="0" algn="l">
-              <a:spcBef>
-                <a:spcPts val="1417"/>
+            <a:pPr indent="-308610" lvl="1" marL="914400" marR="0" rtl="0" algn="l">
+              <a:lnSpc>
+                <a:spcPct val="90000"/>
+              </a:lnSpc>
+              <a:spcBef>
+                <a:spcPts val="0"/>
               </a:spcBef>
               <a:spcAft>
                 <a:spcPts val="0"/>
               </a:spcAft>
               <a:buClr>
-                <a:schemeClr val="dk1"/>
+                <a:srgbClr val="000000"/>
               </a:buClr>
               <a:buSzPts val="1260"/>
-              <a:buFont typeface="Noto Sans Symbols"/>
+              <a:buFont typeface="Arial"/>
               <a:buChar char="○"/>
             </a:pPr>
             <a:r>
